--- a/slides/Lezione_15_settembre_Agenti_AI_PromoPA.pptx
+++ b/slides/Lezione_15_settembre_Agenti_AI_PromoPA.pptx
@@ -7099,7 +7099,7 @@
         </p:nvSpPr>
         <p:spPr>
           <a:xfrm>
-            <a:off x="2700000" y="3760000"/>
+            <a:off x="2700000" y="3835000"/>
             <a:ext cx="6200000" cy="420000"/>
           </a:xfrm>
           <a:prstGeom prst="rect">
@@ -8060,7 +8060,7 @@
                 </a:solidFill>
                 <a:latin typeface="Arial"/>
               </a:rPr>
-              <a:t>Ordine consigliato: 1, 3, 4, poi 2</a:t>
+              <a:t>Ordine consigliato: prima 1, 3 e 4, poi la 2</a:t>
             </a:r>
           </a:p>
         </p:txBody>
@@ -8359,7 +8359,7 @@
         <p:spPr>
           <a:xfrm>
             <a:off x="4486320" y="1150000"/>
-            <a:ext cx="4477680" cy="3380000"/>
+            <a:ext cx="4477680" cy="3200000"/>
           </a:xfrm>
           <a:prstGeom prst="rect">
             <a:avLst/>
@@ -8689,7 +8689,7 @@
         <p:spPr>
           <a:xfrm>
             <a:off x="4662000" y="1150000"/>
-            <a:ext cx="4302000" cy="3380000"/>
+            <a:ext cx="4302000" cy="3200000"/>
           </a:xfrm>
           <a:prstGeom prst="rect">
             <a:avLst/>
@@ -9031,7 +9031,7 @@
         <p:spPr>
           <a:xfrm>
             <a:off x="4837680" y="1150000"/>
-            <a:ext cx="4126320" cy="3380000"/>
+            <a:ext cx="4126320" cy="3200000"/>
           </a:xfrm>
           <a:prstGeom prst="rect">
             <a:avLst/>
@@ -9167,7 +9167,7 @@
                 </a:solidFill>
                 <a:latin typeface="Courier New"/>
               </a:rPr>
-              <a:t>    entro venerdi"</a:t>
+              <a:t>    entro venerdì"</a:t>
             </a:r>
           </a:p>
           <a:p>
@@ -9782,7 +9782,7 @@
         <p:spPr>
           <a:xfrm>
             <a:off x="180000" y="1150000"/>
-            <a:ext cx="8784000" cy="3400000"/>
+            <a:ext cx="8784000" cy="3200000"/>
           </a:xfrm>
           <a:prstGeom prst="rect">
             <a:avLst/>
@@ -10580,7 +10580,7 @@
                 </a:solidFill>
                 <a:latin typeface="Arial"/>
               </a:rPr>
-              <a:t>La tassonomia invecchia: nuovi corsi, nuovi ruoli. Qualcuno la possiede e la aggiorna</a:t>
+              <a:t>La tassonomia invecchia: nuovi corsi, nuovi ruoli. Qualcuno la possiede e l'aggiorna</a:t>
             </a:r>
           </a:p>
           <a:p>

--- a/slides/Lezione_15_settembre_Agenti_AI_PromoPA.pptx
+++ b/slides/Lezione_15_settembre_Agenti_AI_PromoPA.pptx
@@ -1889,7 +1889,7 @@
           <a:lstStyle/>
           <a:p>
             <a:r>
-              <a:t>Fonti: Reg. UE 2024/1689; Reg. UE 2026/1744 (AI Omnibus, in vigore dal 27 luglio 2026). Dettagli e punti da verificare in docs/normativa.md. Finché l'invio resta umano, art. 50 non scatta per la risposta.</a:t>
+              <a:t>Fonti: Reg. UE 2024/1689; Reg. UE 2026/1744 (AI Omnibus, pubblicato il 24 luglio 2026, in vigore dal 27). L'omnibus ha riscritto l'art. 4: la data resta il 2 febbraio 2025, ma l'obbligo passa da garantire un livello di competenza ad adottare misure proporzionate. Dettagli e fonti in docs/normativa.md. Finché l'invio resta umano, art. 50 non scatta per la risposta.</a:t>
             </a:r>
           </a:p>
         </p:txBody>
@@ -1947,7 +1947,7 @@
           <a:lstStyle/>
           <a:p>
             <a:r>
-              <a:t>Non fare l'avvocato. Il messaggio è: il caso è nel perimetro semplice, a condizione che invio e decisioni restino umani e che i due documenti esistano.</a:t>
+              <a:t>Non fare l'avvocato. Art. 14 vincola le PA, non la Fondazione: lo citiamo perché è il metro con cui gli enti clienti guarderanno il servizio. Linee guida AgID approvate in Conferenza Unificata il 10 settembre 2025. Il messaggio è: il caso è nel perimetro semplice, a condizione che invio e decisioni restino umani e che i due documenti esistano.</a:t>
             </a:r>
           </a:p>
         </p:txBody>
@@ -2759,7 +2759,7 @@
           <a:lstStyle/>
           <a:p>
             <a:r>
-              <a:t>Sostituire la prima riga con l'URL GitHub una volta pubblicato.</a:t>
+              <a:t>ATTENZIONE: il repository non è ancora pubblicato. Sostituire &lt;da completare&gt; con l'account GitHub prima della lezione, poi rigenerare il deck. Il comando di push è in HANDOFF.md.</a:t>
             </a:r>
           </a:p>
         </p:txBody>
@@ -10451,7 +10451,7 @@
                 </a:solidFill>
                 <a:latin typeface="Arial"/>
               </a:rPr>
-              <a:t>Legge 132/2025: supervisione umana, tracciabilità, responsabilità che resta alla persona</a:t>
+              <a:t>Legge 132/2025, art. 14: l'AI è di supporto, la responsabilità del provvedimento resta alla persona</a:t>
             </a:r>
           </a:p>
           <a:p>
@@ -12206,7 +12206,7 @@
                 </a:solidFill>
                 <a:latin typeface="Arial"/>
               </a:rPr>
-              <a:t>Repository con codice, dati di esempio, griglia e queste slide: link nel messaggio di oggi</a:t>
+              <a:t>Codice, dati, griglia e slide: github.com/&lt;da completare&gt;/promopa-agenti-ai</a:t>
             </a:r>
           </a:p>
           <a:p>
